--- a/public/fun/cards/expert/expert-20.pptx
+++ b/public/fun/cards/expert/expert-20.pptx
@@ -3085,7 +3085,7 @@
     <p:bg>
       <p:bgPr>
         <a:solidFill>
-          <a:srgbClr val="FAF6EF"/>
+          <a:srgbClr val="0E1116"/>
         </a:solidFill>
         <a:effectLst/>
       </p:bgPr>
@@ -3099,22 +3099,20 @@
       <p:grpSpPr/>
       <p:sp>
         <p:nvSpPr>
-          <p:cNvPr id="2" name="Oval 1"/>
+          <p:cNvPr id="2" name="Rectangle 1"/>
           <p:cNvSpPr/>
           <p:nvPr/>
         </p:nvSpPr>
         <p:spPr>
           <a:xfrm>
-            <a:off x="2462400" y="158400"/>
-            <a:ext cx="43200" cy="43200"/>
+            <a:off x="252000" y="144000"/>
+            <a:ext cx="201600" cy="21600"/>
           </a:xfrm>
-          <a:prstGeom prst="ellipse">
+          <a:prstGeom prst="rect">
             <a:avLst/>
           </a:prstGeom>
           <a:solidFill>
-            <a:srgbClr val="C49645">
-              <a:alpha val="70000"/>
-            </a:srgbClr>
+            <a:srgbClr val="00D0E0"/>
           </a:solidFill>
           <a:ln>
             <a:noFill/>
@@ -3130,661 +3128,14 @@
       </p:sp>
       <p:sp>
         <p:nvSpPr>
-          <p:cNvPr id="3" name="Oval 2"/>
-          <p:cNvSpPr/>
+          <p:cNvPr id="3" name="텍스트"/>
+          <p:cNvSpPr txBox="1"/>
           <p:nvPr/>
         </p:nvSpPr>
         <p:spPr>
           <a:xfrm>
-            <a:off x="2462400" y="266400"/>
-            <a:ext cx="43200" cy="43200"/>
-          </a:xfrm>
-          <a:prstGeom prst="ellipse">
-            <a:avLst/>
-          </a:prstGeom>
-          <a:solidFill>
-            <a:srgbClr val="C49645">
-              <a:alpha val="57999"/>
-            </a:srgbClr>
-          </a:solidFill>
-          <a:ln>
-            <a:noFill/>
-          </a:ln>
-        </p:spPr>
-        <p:txBody>
-          <a:bodyPr rtlCol="0" anchor="ctr"/>
-          <a:lstStyle/>
-          <a:p>
-            <a:pPr algn="ctr"/>
-          </a:p>
-        </p:txBody>
-      </p:sp>
-      <p:sp>
-        <p:nvSpPr>
-          <p:cNvPr id="4" name="Oval 3"/>
-          <p:cNvSpPr/>
-          <p:nvPr/>
-        </p:nvSpPr>
-        <p:spPr>
-          <a:xfrm>
-            <a:off x="2462400" y="374400"/>
-            <a:ext cx="43200" cy="43200"/>
-          </a:xfrm>
-          <a:prstGeom prst="ellipse">
-            <a:avLst/>
-          </a:prstGeom>
-          <a:solidFill>
-            <a:srgbClr val="C49645">
-              <a:alpha val="46000"/>
-            </a:srgbClr>
-          </a:solidFill>
-          <a:ln>
-            <a:noFill/>
-          </a:ln>
-        </p:spPr>
-        <p:txBody>
-          <a:bodyPr rtlCol="0" anchor="ctr"/>
-          <a:lstStyle/>
-          <a:p>
-            <a:pPr algn="ctr"/>
-          </a:p>
-        </p:txBody>
-      </p:sp>
-      <p:sp>
-        <p:nvSpPr>
-          <p:cNvPr id="5" name="Oval 4"/>
-          <p:cNvSpPr/>
-          <p:nvPr/>
-        </p:nvSpPr>
-        <p:spPr>
-          <a:xfrm>
-            <a:off x="2462400" y="482400"/>
-            <a:ext cx="43200" cy="43200"/>
-          </a:xfrm>
-          <a:prstGeom prst="ellipse">
-            <a:avLst/>
-          </a:prstGeom>
-          <a:solidFill>
-            <a:srgbClr val="C49645">
-              <a:alpha val="34000"/>
-            </a:srgbClr>
-          </a:solidFill>
-          <a:ln>
-            <a:noFill/>
-          </a:ln>
-        </p:spPr>
-        <p:txBody>
-          <a:bodyPr rtlCol="0" anchor="ctr"/>
-          <a:lstStyle/>
-          <a:p>
-            <a:pPr algn="ctr"/>
-          </a:p>
-        </p:txBody>
-      </p:sp>
-      <p:sp>
-        <p:nvSpPr>
-          <p:cNvPr id="6" name="Oval 5"/>
-          <p:cNvSpPr/>
-          <p:nvPr/>
-        </p:nvSpPr>
-        <p:spPr>
-          <a:xfrm>
-            <a:off x="2570400" y="158400"/>
-            <a:ext cx="43200" cy="43200"/>
-          </a:xfrm>
-          <a:prstGeom prst="ellipse">
-            <a:avLst/>
-          </a:prstGeom>
-          <a:solidFill>
-            <a:srgbClr val="C49645">
-              <a:alpha val="70000"/>
-            </a:srgbClr>
-          </a:solidFill>
-          <a:ln>
-            <a:noFill/>
-          </a:ln>
-        </p:spPr>
-        <p:txBody>
-          <a:bodyPr rtlCol="0" anchor="ctr"/>
-          <a:lstStyle/>
-          <a:p>
-            <a:pPr algn="ctr"/>
-          </a:p>
-        </p:txBody>
-      </p:sp>
-      <p:sp>
-        <p:nvSpPr>
-          <p:cNvPr id="7" name="Oval 6"/>
-          <p:cNvSpPr/>
-          <p:nvPr/>
-        </p:nvSpPr>
-        <p:spPr>
-          <a:xfrm>
-            <a:off x="2570400" y="266400"/>
-            <a:ext cx="43200" cy="43200"/>
-          </a:xfrm>
-          <a:prstGeom prst="ellipse">
-            <a:avLst/>
-          </a:prstGeom>
-          <a:solidFill>
-            <a:srgbClr val="C49645">
-              <a:alpha val="57999"/>
-            </a:srgbClr>
-          </a:solidFill>
-          <a:ln>
-            <a:noFill/>
-          </a:ln>
-        </p:spPr>
-        <p:txBody>
-          <a:bodyPr rtlCol="0" anchor="ctr"/>
-          <a:lstStyle/>
-          <a:p>
-            <a:pPr algn="ctr"/>
-          </a:p>
-        </p:txBody>
-      </p:sp>
-      <p:sp>
-        <p:nvSpPr>
-          <p:cNvPr id="8" name="Oval 7"/>
-          <p:cNvSpPr/>
-          <p:nvPr/>
-        </p:nvSpPr>
-        <p:spPr>
-          <a:xfrm>
-            <a:off x="2570400" y="374400"/>
-            <a:ext cx="43200" cy="43200"/>
-          </a:xfrm>
-          <a:prstGeom prst="ellipse">
-            <a:avLst/>
-          </a:prstGeom>
-          <a:solidFill>
-            <a:srgbClr val="C49645">
-              <a:alpha val="46000"/>
-            </a:srgbClr>
-          </a:solidFill>
-          <a:ln>
-            <a:noFill/>
-          </a:ln>
-        </p:spPr>
-        <p:txBody>
-          <a:bodyPr rtlCol="0" anchor="ctr"/>
-          <a:lstStyle/>
-          <a:p>
-            <a:pPr algn="ctr"/>
-          </a:p>
-        </p:txBody>
-      </p:sp>
-      <p:sp>
-        <p:nvSpPr>
-          <p:cNvPr id="9" name="Oval 8"/>
-          <p:cNvSpPr/>
-          <p:nvPr/>
-        </p:nvSpPr>
-        <p:spPr>
-          <a:xfrm>
-            <a:off x="2570400" y="482400"/>
-            <a:ext cx="43200" cy="43200"/>
-          </a:xfrm>
-          <a:prstGeom prst="ellipse">
-            <a:avLst/>
-          </a:prstGeom>
-          <a:solidFill>
-            <a:srgbClr val="C49645">
-              <a:alpha val="34000"/>
-            </a:srgbClr>
-          </a:solidFill>
-          <a:ln>
-            <a:noFill/>
-          </a:ln>
-        </p:spPr>
-        <p:txBody>
-          <a:bodyPr rtlCol="0" anchor="ctr"/>
-          <a:lstStyle/>
-          <a:p>
-            <a:pPr algn="ctr"/>
-          </a:p>
-        </p:txBody>
-      </p:sp>
-      <p:sp>
-        <p:nvSpPr>
-          <p:cNvPr id="10" name="Oval 9"/>
-          <p:cNvSpPr/>
-          <p:nvPr/>
-        </p:nvSpPr>
-        <p:spPr>
-          <a:xfrm>
-            <a:off x="2678400" y="158400"/>
-            <a:ext cx="43200" cy="43200"/>
-          </a:xfrm>
-          <a:prstGeom prst="ellipse">
-            <a:avLst/>
-          </a:prstGeom>
-          <a:solidFill>
-            <a:srgbClr val="C49645">
-              <a:alpha val="70000"/>
-            </a:srgbClr>
-          </a:solidFill>
-          <a:ln>
-            <a:noFill/>
-          </a:ln>
-        </p:spPr>
-        <p:txBody>
-          <a:bodyPr rtlCol="0" anchor="ctr"/>
-          <a:lstStyle/>
-          <a:p>
-            <a:pPr algn="ctr"/>
-          </a:p>
-        </p:txBody>
-      </p:sp>
-      <p:sp>
-        <p:nvSpPr>
-          <p:cNvPr id="11" name="Oval 10"/>
-          <p:cNvSpPr/>
-          <p:nvPr/>
-        </p:nvSpPr>
-        <p:spPr>
-          <a:xfrm>
-            <a:off x="2678400" y="266400"/>
-            <a:ext cx="43200" cy="43200"/>
-          </a:xfrm>
-          <a:prstGeom prst="ellipse">
-            <a:avLst/>
-          </a:prstGeom>
-          <a:solidFill>
-            <a:srgbClr val="C49645">
-              <a:alpha val="57999"/>
-            </a:srgbClr>
-          </a:solidFill>
-          <a:ln>
-            <a:noFill/>
-          </a:ln>
-        </p:spPr>
-        <p:txBody>
-          <a:bodyPr rtlCol="0" anchor="ctr"/>
-          <a:lstStyle/>
-          <a:p>
-            <a:pPr algn="ctr"/>
-          </a:p>
-        </p:txBody>
-      </p:sp>
-      <p:sp>
-        <p:nvSpPr>
-          <p:cNvPr id="12" name="Oval 11"/>
-          <p:cNvSpPr/>
-          <p:nvPr/>
-        </p:nvSpPr>
-        <p:spPr>
-          <a:xfrm>
-            <a:off x="2678400" y="374400"/>
-            <a:ext cx="43200" cy="43200"/>
-          </a:xfrm>
-          <a:prstGeom prst="ellipse">
-            <a:avLst/>
-          </a:prstGeom>
-          <a:solidFill>
-            <a:srgbClr val="C49645">
-              <a:alpha val="46000"/>
-            </a:srgbClr>
-          </a:solidFill>
-          <a:ln>
-            <a:noFill/>
-          </a:ln>
-        </p:spPr>
-        <p:txBody>
-          <a:bodyPr rtlCol="0" anchor="ctr"/>
-          <a:lstStyle/>
-          <a:p>
-            <a:pPr algn="ctr"/>
-          </a:p>
-        </p:txBody>
-      </p:sp>
-      <p:sp>
-        <p:nvSpPr>
-          <p:cNvPr id="13" name="Oval 12"/>
-          <p:cNvSpPr/>
-          <p:nvPr/>
-        </p:nvSpPr>
-        <p:spPr>
-          <a:xfrm>
-            <a:off x="2678400" y="482400"/>
-            <a:ext cx="43200" cy="43200"/>
-          </a:xfrm>
-          <a:prstGeom prst="ellipse">
-            <a:avLst/>
-          </a:prstGeom>
-          <a:solidFill>
-            <a:srgbClr val="C49645">
-              <a:alpha val="34000"/>
-            </a:srgbClr>
-          </a:solidFill>
-          <a:ln>
-            <a:noFill/>
-          </a:ln>
-        </p:spPr>
-        <p:txBody>
-          <a:bodyPr rtlCol="0" anchor="ctr"/>
-          <a:lstStyle/>
-          <a:p>
-            <a:pPr algn="ctr"/>
-          </a:p>
-        </p:txBody>
-      </p:sp>
-      <p:sp>
-        <p:nvSpPr>
-          <p:cNvPr id="14" name="Oval 13"/>
-          <p:cNvSpPr/>
-          <p:nvPr/>
-        </p:nvSpPr>
-        <p:spPr>
-          <a:xfrm>
-            <a:off x="2786400" y="158400"/>
-            <a:ext cx="43200" cy="43200"/>
-          </a:xfrm>
-          <a:prstGeom prst="ellipse">
-            <a:avLst/>
-          </a:prstGeom>
-          <a:solidFill>
-            <a:srgbClr val="C49645">
-              <a:alpha val="70000"/>
-            </a:srgbClr>
-          </a:solidFill>
-          <a:ln>
-            <a:noFill/>
-          </a:ln>
-        </p:spPr>
-        <p:txBody>
-          <a:bodyPr rtlCol="0" anchor="ctr"/>
-          <a:lstStyle/>
-          <a:p>
-            <a:pPr algn="ctr"/>
-          </a:p>
-        </p:txBody>
-      </p:sp>
-      <p:sp>
-        <p:nvSpPr>
-          <p:cNvPr id="15" name="Oval 14"/>
-          <p:cNvSpPr/>
-          <p:nvPr/>
-        </p:nvSpPr>
-        <p:spPr>
-          <a:xfrm>
-            <a:off x="2786400" y="266400"/>
-            <a:ext cx="43200" cy="43200"/>
-          </a:xfrm>
-          <a:prstGeom prst="ellipse">
-            <a:avLst/>
-          </a:prstGeom>
-          <a:solidFill>
-            <a:srgbClr val="C49645">
-              <a:alpha val="57999"/>
-            </a:srgbClr>
-          </a:solidFill>
-          <a:ln>
-            <a:noFill/>
-          </a:ln>
-        </p:spPr>
-        <p:txBody>
-          <a:bodyPr rtlCol="0" anchor="ctr"/>
-          <a:lstStyle/>
-          <a:p>
-            <a:pPr algn="ctr"/>
-          </a:p>
-        </p:txBody>
-      </p:sp>
-      <p:sp>
-        <p:nvSpPr>
-          <p:cNvPr id="16" name="Oval 15"/>
-          <p:cNvSpPr/>
-          <p:nvPr/>
-        </p:nvSpPr>
-        <p:spPr>
-          <a:xfrm>
-            <a:off x="2786400" y="374400"/>
-            <a:ext cx="43200" cy="43200"/>
-          </a:xfrm>
-          <a:prstGeom prst="ellipse">
-            <a:avLst/>
-          </a:prstGeom>
-          <a:solidFill>
-            <a:srgbClr val="C49645">
-              <a:alpha val="46000"/>
-            </a:srgbClr>
-          </a:solidFill>
-          <a:ln>
-            <a:noFill/>
-          </a:ln>
-        </p:spPr>
-        <p:txBody>
-          <a:bodyPr rtlCol="0" anchor="ctr"/>
-          <a:lstStyle/>
-          <a:p>
-            <a:pPr algn="ctr"/>
-          </a:p>
-        </p:txBody>
-      </p:sp>
-      <p:sp>
-        <p:nvSpPr>
-          <p:cNvPr id="17" name="Oval 16"/>
-          <p:cNvSpPr/>
-          <p:nvPr/>
-        </p:nvSpPr>
-        <p:spPr>
-          <a:xfrm>
-            <a:off x="2786400" y="482400"/>
-            <a:ext cx="43200" cy="43200"/>
-          </a:xfrm>
-          <a:prstGeom prst="ellipse">
-            <a:avLst/>
-          </a:prstGeom>
-          <a:solidFill>
-            <a:srgbClr val="C49645">
-              <a:alpha val="34000"/>
-            </a:srgbClr>
-          </a:solidFill>
-          <a:ln>
-            <a:noFill/>
-          </a:ln>
-        </p:spPr>
-        <p:txBody>
-          <a:bodyPr rtlCol="0" anchor="ctr"/>
-          <a:lstStyle/>
-          <a:p>
-            <a:pPr algn="ctr"/>
-          </a:p>
-        </p:txBody>
-      </p:sp>
-      <p:sp>
-        <p:nvSpPr>
-          <p:cNvPr id="18" name="Oval 17"/>
-          <p:cNvSpPr/>
-          <p:nvPr/>
-        </p:nvSpPr>
-        <p:spPr>
-          <a:xfrm>
-            <a:off x="2894400" y="158400"/>
-            <a:ext cx="43200" cy="43200"/>
-          </a:xfrm>
-          <a:prstGeom prst="ellipse">
-            <a:avLst/>
-          </a:prstGeom>
-          <a:solidFill>
-            <a:srgbClr val="C49645">
-              <a:alpha val="70000"/>
-            </a:srgbClr>
-          </a:solidFill>
-          <a:ln>
-            <a:noFill/>
-          </a:ln>
-        </p:spPr>
-        <p:txBody>
-          <a:bodyPr rtlCol="0" anchor="ctr"/>
-          <a:lstStyle/>
-          <a:p>
-            <a:pPr algn="ctr"/>
-          </a:p>
-        </p:txBody>
-      </p:sp>
-      <p:sp>
-        <p:nvSpPr>
-          <p:cNvPr id="19" name="Oval 18"/>
-          <p:cNvSpPr/>
-          <p:nvPr/>
-        </p:nvSpPr>
-        <p:spPr>
-          <a:xfrm>
-            <a:off x="2894400" y="266400"/>
-            <a:ext cx="43200" cy="43200"/>
-          </a:xfrm>
-          <a:prstGeom prst="ellipse">
-            <a:avLst/>
-          </a:prstGeom>
-          <a:solidFill>
-            <a:srgbClr val="C49645">
-              <a:alpha val="57999"/>
-            </a:srgbClr>
-          </a:solidFill>
-          <a:ln>
-            <a:noFill/>
-          </a:ln>
-        </p:spPr>
-        <p:txBody>
-          <a:bodyPr rtlCol="0" anchor="ctr"/>
-          <a:lstStyle/>
-          <a:p>
-            <a:pPr algn="ctr"/>
-          </a:p>
-        </p:txBody>
-      </p:sp>
-      <p:sp>
-        <p:nvSpPr>
-          <p:cNvPr id="20" name="Oval 19"/>
-          <p:cNvSpPr/>
-          <p:nvPr/>
-        </p:nvSpPr>
-        <p:spPr>
-          <a:xfrm>
-            <a:off x="2894400" y="374400"/>
-            <a:ext cx="43200" cy="43200"/>
-          </a:xfrm>
-          <a:prstGeom prst="ellipse">
-            <a:avLst/>
-          </a:prstGeom>
-          <a:solidFill>
-            <a:srgbClr val="C49645">
-              <a:alpha val="46000"/>
-            </a:srgbClr>
-          </a:solidFill>
-          <a:ln>
-            <a:noFill/>
-          </a:ln>
-        </p:spPr>
-        <p:txBody>
-          <a:bodyPr rtlCol="0" anchor="ctr"/>
-          <a:lstStyle/>
-          <a:p>
-            <a:pPr algn="ctr"/>
-          </a:p>
-        </p:txBody>
-      </p:sp>
-      <p:sp>
-        <p:nvSpPr>
-          <p:cNvPr id="21" name="Oval 20"/>
-          <p:cNvSpPr/>
-          <p:nvPr/>
-        </p:nvSpPr>
-        <p:spPr>
-          <a:xfrm>
-            <a:off x="2894400" y="482400"/>
-            <a:ext cx="43200" cy="43200"/>
-          </a:xfrm>
-          <a:prstGeom prst="ellipse">
-            <a:avLst/>
-          </a:prstGeom>
-          <a:solidFill>
-            <a:srgbClr val="C49645">
-              <a:alpha val="34000"/>
-            </a:srgbClr>
-          </a:solidFill>
-          <a:ln>
-            <a:noFill/>
-          </a:ln>
-        </p:spPr>
-        <p:txBody>
-          <a:bodyPr rtlCol="0" anchor="ctr"/>
-          <a:lstStyle/>
-          <a:p>
-            <a:pPr algn="ctr"/>
-          </a:p>
-        </p:txBody>
-      </p:sp>
-      <p:sp>
-        <p:nvSpPr>
-          <p:cNvPr id="22" name="Rectangle 21"/>
-          <p:cNvSpPr/>
-          <p:nvPr/>
-        </p:nvSpPr>
-        <p:spPr>
-          <a:xfrm>
-            <a:off x="0" y="1663200"/>
-            <a:ext cx="3240000" cy="136800"/>
-          </a:xfrm>
-          <a:prstGeom prst="rect">
-            <a:avLst/>
-          </a:prstGeom>
-          <a:solidFill>
-            <a:srgbClr val="C49645"/>
-          </a:solidFill>
-          <a:ln>
-            <a:noFill/>
-          </a:ln>
-        </p:spPr>
-        <p:txBody>
-          <a:bodyPr rtlCol="0" anchor="ctr"/>
-          <a:lstStyle/>
-          <a:p>
-            <a:pPr algn="ctr"/>
-          </a:p>
-        </p:txBody>
-      </p:sp>
-      <p:sp>
-        <p:nvSpPr>
-          <p:cNvPr id="23" name="Rectangle 22"/>
-          <p:cNvSpPr/>
-          <p:nvPr/>
-        </p:nvSpPr>
-        <p:spPr>
-          <a:xfrm>
-            <a:off x="0" y="1663200"/>
-            <a:ext cx="936000" cy="136800"/>
-          </a:xfrm>
-          <a:prstGeom prst="rect">
-            <a:avLst/>
-          </a:prstGeom>
-          <a:solidFill>
-            <a:srgbClr val="F6EDDD"/>
-          </a:solidFill>
-          <a:ln>
-            <a:noFill/>
-          </a:ln>
-        </p:spPr>
-        <p:txBody>
-          <a:bodyPr rtlCol="0" anchor="ctr"/>
-          <a:lstStyle/>
-          <a:p>
-            <a:pPr algn="ctr"/>
-          </a:p>
-        </p:txBody>
-      </p:sp>
-      <p:sp>
-        <p:nvSpPr>
-          <p:cNvPr id="24" name="텍스트"/>
-          <p:cNvSpPr txBox="1"/>
-          <p:nvPr/>
-        </p:nvSpPr>
-        <p:spPr>
-          <a:xfrm>
-            <a:off x="252000" y="208800"/>
-            <a:ext cx="1800000" cy="100800"/>
+            <a:off x="252000" y="273600"/>
+            <a:ext cx="2160000" cy="360000"/>
           </a:xfrm>
           <a:prstGeom prst="rect">
             <a:avLst/>
@@ -3799,32 +3150,32 @@
           <a:p>
             <a:pPr algn="l">
               <a:lnSpc>
-                <a:spcPts val="1087"/>
+                <a:spcPts val="3190"/>
               </a:lnSpc>
             </a:pPr>
             <a:r>
-              <a:rPr sz="750" b="1" spc="150">
+              <a:rPr sz="2200" b="1">
                 <a:solidFill>
-                  <a:srgbClr val="7E6E52"/>
+                  <a:srgbClr val="FFFFFF"/>
                 </a:solidFill>
                 <a:latin typeface="맑은 고딕"/>
                 <a:ea typeface="맑은 고딕"/>
               </a:rPr>
-              <a:t>소속 · 브랜드</a:t>
-            </a:r>
-          </a:p>
-        </p:txBody>
-      </p:sp>
-      <p:sp>
-        <p:nvSpPr>
-          <p:cNvPr id="25" name="텍스트"/>
+              <a:t>홍석진</a:t>
+            </a:r>
+          </a:p>
+        </p:txBody>
+      </p:sp>
+      <p:sp>
+        <p:nvSpPr>
+          <p:cNvPr id="4" name="텍스트"/>
           <p:cNvSpPr txBox="1"/>
           <p:nvPr/>
         </p:nvSpPr>
         <p:spPr>
           <a:xfrm>
-            <a:off x="252000" y="540000"/>
-            <a:ext cx="2016000" cy="313692"/>
+            <a:off x="252000" y="676800"/>
+            <a:ext cx="2160000" cy="171451"/>
           </a:xfrm>
           <a:prstGeom prst="rect">
             <a:avLst/>
@@ -3839,32 +3190,32 @@
           <a:p>
             <a:pPr algn="l">
               <a:lnSpc>
-                <a:spcPts val="2755"/>
+                <a:spcPts val="1305"/>
               </a:lnSpc>
             </a:pPr>
             <a:r>
-              <a:rPr sz="1900" b="1" spc="50">
+              <a:rPr sz="900" b="0">
                 <a:solidFill>
-                  <a:srgbClr val="7C5D27"/>
+                  <a:srgbClr val="A3A9B5"/>
                 </a:solidFill>
                 <a:latin typeface="맑은 고딕"/>
                 <a:ea typeface="맑은 고딕"/>
               </a:rPr>
-              <a:t>홍석진</a:t>
-            </a:r>
-          </a:p>
-        </p:txBody>
-      </p:sp>
-      <p:sp>
-        <p:nvSpPr>
-          <p:cNvPr id="26" name="텍스트"/>
+              <a:t>프로젝트 매니저</a:t>
+            </a:r>
+          </a:p>
+        </p:txBody>
+      </p:sp>
+      <p:sp>
+        <p:nvSpPr>
+          <p:cNvPr id="5" name="텍스트"/>
           <p:cNvSpPr txBox="1"/>
           <p:nvPr/>
         </p:nvSpPr>
         <p:spPr>
           <a:xfrm>
-            <a:off x="252000" y="828000"/>
-            <a:ext cx="2016000" cy="122400"/>
+            <a:off x="1548000" y="230400"/>
+            <a:ext cx="1440000" cy="123826"/>
           </a:xfrm>
           <a:prstGeom prst="rect">
             <a:avLst/>
@@ -3877,34 +3228,55 @@
           </a:bodyPr>
           <a:lstStyle/>
           <a:p>
-            <a:pPr algn="l">
+            <a:pPr algn="r">
               <a:lnSpc>
-                <a:spcPts val="1232"/>
+                <a:spcPts val="942"/>
               </a:lnSpc>
             </a:pPr>
             <a:r>
-              <a:rPr sz="850" b="1">
+              <a:rPr sz="650" b="1" spc="200">
                 <a:solidFill>
-                  <a:srgbClr val="896930"/>
+                  <a:srgbClr val="A3A9B5"/>
                 </a:solidFill>
                 <a:latin typeface="맑은 고딕"/>
                 <a:ea typeface="맑은 고딕"/>
               </a:rPr>
-              <a:t>프로젝트 매니저</a:t>
-            </a:r>
-          </a:p>
-        </p:txBody>
-      </p:sp>
-      <p:sp>
-        <p:nvSpPr>
-          <p:cNvPr id="27" name="텍스트"/>
+              <a:t>소속 · 브랜드</a:t>
+            </a:r>
+          </a:p>
+        </p:txBody>
+      </p:sp>
+      <p:cxnSp>
+        <p:nvCxnSpPr>
+          <p:cNvPr id="6" name="Connector 5"/>
+          <p:cNvCxnSpPr/>
+          <p:nvPr/>
+        </p:nvCxnSpPr>
+        <p:spPr>
+          <a:xfrm>
+            <a:off x="252000" y="1051200"/>
+            <a:ext cx="2736000" cy="0"/>
+          </a:xfrm>
+          <a:prstGeom prst="line">
+            <a:avLst/>
+          </a:prstGeom>
+          <a:ln w="5760">
+            <a:solidFill>
+              <a:srgbClr val="2A2F38"/>
+            </a:solidFill>
+          </a:ln>
+        </p:spPr>
+      </p:cxnSp>
+      <p:sp>
+        <p:nvSpPr>
+          <p:cNvPr id="7" name="텍스트"/>
           <p:cNvSpPr txBox="1"/>
           <p:nvPr/>
         </p:nvSpPr>
         <p:spPr>
           <a:xfrm>
-            <a:off x="252000" y="1108800"/>
-            <a:ext cx="122400" cy="168911"/>
+            <a:off x="252000" y="1123200"/>
+            <a:ext cx="576000" cy="99061"/>
           </a:xfrm>
           <a:prstGeom prst="rect">
             <a:avLst/>
@@ -3919,32 +3291,32 @@
           <a:p>
             <a:pPr algn="l">
               <a:lnSpc>
-                <a:spcPts val="1015"/>
+                <a:spcPts val="754"/>
               </a:lnSpc>
             </a:pPr>
             <a:r>
-              <a:rPr sz="700" b="1">
+              <a:rPr sz="520" b="1" spc="150">
                 <a:solidFill>
-                  <a:srgbClr val="896930"/>
+                  <a:srgbClr val="A3A9B5"/>
                 </a:solidFill>
                 <a:latin typeface="맑은 고딕"/>
                 <a:ea typeface="맑은 고딕"/>
               </a:rPr>
-              <a:t>T</a:t>
-            </a:r>
-          </a:p>
-        </p:txBody>
-      </p:sp>
-      <p:sp>
-        <p:nvSpPr>
-          <p:cNvPr id="28" name="텍스트"/>
+              <a:t>TEL</a:t>
+            </a:r>
+          </a:p>
+        </p:txBody>
+      </p:sp>
+      <p:sp>
+        <p:nvSpPr>
+          <p:cNvPr id="8" name="텍스트"/>
           <p:cNvSpPr txBox="1"/>
           <p:nvPr/>
         </p:nvSpPr>
         <p:spPr>
           <a:xfrm>
-            <a:off x="396000" y="1108800"/>
-            <a:ext cx="1584000" cy="168911"/>
+            <a:off x="900000" y="1101600"/>
+            <a:ext cx="2088000" cy="142876"/>
           </a:xfrm>
           <a:prstGeom prst="rect">
             <a:avLst/>
@@ -3959,13 +3331,13 @@
           <a:p>
             <a:pPr algn="l">
               <a:lnSpc>
-                <a:spcPts val="1015"/>
+                <a:spcPts val="1087"/>
               </a:lnSpc>
             </a:pPr>
             <a:r>
-              <a:rPr sz="700" b="0">
+              <a:rPr sz="750" b="0">
                 <a:solidFill>
-                  <a:srgbClr val="7C5D27"/>
+                  <a:srgbClr val="FFFFFF"/>
                 </a:solidFill>
                 <a:latin typeface="맑은 고딕"/>
                 <a:ea typeface="맑은 고딕"/>
@@ -3975,16 +3347,37 @@
           </a:p>
         </p:txBody>
       </p:sp>
-      <p:sp>
-        <p:nvSpPr>
-          <p:cNvPr id="29" name="텍스트"/>
+      <p:cxnSp>
+        <p:nvCxnSpPr>
+          <p:cNvPr id="9" name="Connector 8"/>
+          <p:cNvCxnSpPr/>
+          <p:nvPr/>
+        </p:nvCxnSpPr>
+        <p:spPr>
+          <a:xfrm>
+            <a:off x="252000" y="1274400"/>
+            <a:ext cx="2736000" cy="0"/>
+          </a:xfrm>
+          <a:prstGeom prst="line">
+            <a:avLst/>
+          </a:prstGeom>
+          <a:ln w="5760">
+            <a:solidFill>
+              <a:srgbClr val="2A2F38"/>
+            </a:solidFill>
+          </a:ln>
+        </p:spPr>
+      </p:cxnSp>
+      <p:sp>
+        <p:nvSpPr>
+          <p:cNvPr id="10" name="텍스트"/>
           <p:cNvSpPr txBox="1"/>
           <p:nvPr/>
         </p:nvSpPr>
         <p:spPr>
           <a:xfrm>
-            <a:off x="252000" y="1277711"/>
-            <a:ext cx="122400" cy="168911"/>
+            <a:off x="252000" y="1346400"/>
+            <a:ext cx="576000" cy="99061"/>
           </a:xfrm>
           <a:prstGeom prst="rect">
             <a:avLst/>
@@ -3999,32 +3392,32 @@
           <a:p>
             <a:pPr algn="l">
               <a:lnSpc>
-                <a:spcPts val="1015"/>
+                <a:spcPts val="754"/>
               </a:lnSpc>
             </a:pPr>
             <a:r>
-              <a:rPr sz="700" b="1">
+              <a:rPr sz="520" b="1" spc="150">
                 <a:solidFill>
-                  <a:srgbClr val="896930"/>
+                  <a:srgbClr val="A3A9B5"/>
                 </a:solidFill>
                 <a:latin typeface="맑은 고딕"/>
                 <a:ea typeface="맑은 고딕"/>
               </a:rPr>
-              <a:t>E</a:t>
-            </a:r>
-          </a:p>
-        </p:txBody>
-      </p:sp>
-      <p:sp>
-        <p:nvSpPr>
-          <p:cNvPr id="30" name="텍스트"/>
+              <a:t>MAIL</a:t>
+            </a:r>
+          </a:p>
+        </p:txBody>
+      </p:sp>
+      <p:sp>
+        <p:nvSpPr>
+          <p:cNvPr id="11" name="텍스트"/>
           <p:cNvSpPr txBox="1"/>
           <p:nvPr/>
         </p:nvSpPr>
         <p:spPr>
           <a:xfrm>
-            <a:off x="396000" y="1277711"/>
-            <a:ext cx="1584000" cy="168911"/>
+            <a:off x="900000" y="1324800"/>
+            <a:ext cx="2088000" cy="142876"/>
           </a:xfrm>
           <a:prstGeom prst="rect">
             <a:avLst/>
@@ -4039,13 +3432,13 @@
           <a:p>
             <a:pPr algn="l">
               <a:lnSpc>
-                <a:spcPts val="1015"/>
+                <a:spcPts val="1087"/>
               </a:lnSpc>
             </a:pPr>
             <a:r>
-              <a:rPr sz="700" b="0">
+              <a:rPr sz="750" b="0">
                 <a:solidFill>
-                  <a:srgbClr val="7C5D27"/>
+                  <a:srgbClr val="FFFFFF"/>
                 </a:solidFill>
                 <a:latin typeface="맑은 고딕"/>
                 <a:ea typeface="맑은 고딕"/>
@@ -4055,16 +3448,37 @@
           </a:p>
         </p:txBody>
       </p:sp>
-      <p:sp>
-        <p:nvSpPr>
-          <p:cNvPr id="31" name="텍스트"/>
+      <p:cxnSp>
+        <p:nvCxnSpPr>
+          <p:cNvPr id="12" name="Connector 11"/>
+          <p:cNvCxnSpPr/>
+          <p:nvPr/>
+        </p:nvCxnSpPr>
+        <p:spPr>
+          <a:xfrm>
+            <a:off x="252000" y="1497600"/>
+            <a:ext cx="2736000" cy="0"/>
+          </a:xfrm>
+          <a:prstGeom prst="line">
+            <a:avLst/>
+          </a:prstGeom>
+          <a:ln w="5760">
+            <a:solidFill>
+              <a:srgbClr val="2A2F38"/>
+            </a:solidFill>
+          </a:ln>
+        </p:spPr>
+      </p:cxnSp>
+      <p:sp>
+        <p:nvSpPr>
+          <p:cNvPr id="13" name="텍스트"/>
           <p:cNvSpPr txBox="1"/>
           <p:nvPr/>
         </p:nvSpPr>
         <p:spPr>
           <a:xfrm>
-            <a:off x="252000" y="1446622"/>
-            <a:ext cx="122400" cy="168911"/>
+            <a:off x="252000" y="1569600"/>
+            <a:ext cx="576000" cy="99061"/>
           </a:xfrm>
           <a:prstGeom prst="rect">
             <a:avLst/>
@@ -4079,32 +3493,32 @@
           <a:p>
             <a:pPr algn="l">
               <a:lnSpc>
-                <a:spcPts val="1015"/>
+                <a:spcPts val="754"/>
               </a:lnSpc>
             </a:pPr>
             <a:r>
-              <a:rPr sz="700" b="1">
+              <a:rPr sz="520" b="1" spc="150">
                 <a:solidFill>
-                  <a:srgbClr val="896930"/>
+                  <a:srgbClr val="A3A9B5"/>
                 </a:solidFill>
                 <a:latin typeface="맑은 고딕"/>
                 <a:ea typeface="맑은 고딕"/>
               </a:rPr>
-              <a:t>A</a:t>
-            </a:r>
-          </a:p>
-        </p:txBody>
-      </p:sp>
-      <p:sp>
-        <p:nvSpPr>
-          <p:cNvPr id="32" name="텍스트"/>
+              <a:t>ADDR</a:t>
+            </a:r>
+          </a:p>
+        </p:txBody>
+      </p:sp>
+      <p:sp>
+        <p:nvSpPr>
+          <p:cNvPr id="14" name="텍스트"/>
           <p:cNvSpPr txBox="1"/>
           <p:nvPr/>
         </p:nvSpPr>
         <p:spPr>
           <a:xfrm>
-            <a:off x="396000" y="1446622"/>
-            <a:ext cx="1584000" cy="168911"/>
+            <a:off x="900000" y="1548000"/>
+            <a:ext cx="2088000" cy="142876"/>
           </a:xfrm>
           <a:prstGeom prst="rect">
             <a:avLst/>
@@ -4119,13 +3533,13 @@
           <a:p>
             <a:pPr algn="l">
               <a:lnSpc>
-                <a:spcPts val="1015"/>
+                <a:spcPts val="1087"/>
               </a:lnSpc>
             </a:pPr>
             <a:r>
-              <a:rPr sz="700" b="0">
+              <a:rPr sz="750" b="0">
                 <a:solidFill>
-                  <a:srgbClr val="7C5D27"/>
+                  <a:srgbClr val="FFFFFF"/>
                 </a:solidFill>
                 <a:latin typeface="맑은 고딕"/>
                 <a:ea typeface="맑은 고딕"/>
@@ -4137,105 +3551,21 @@
       </p:sp>
       <p:cxnSp>
         <p:nvCxnSpPr>
-          <p:cNvPr id="33" name="Connector 32"/>
-          <p:cNvCxnSpPr/>
-          <p:nvPr/>
-        </p:nvCxnSpPr>
-        <p:spPr>
-          <a:xfrm flipH="1">
-            <a:off x="2764800" y="1113120"/>
-            <a:ext cx="74880" cy="74880"/>
-          </a:xfrm>
-          <a:prstGeom prst="line">
-            <a:avLst/>
-          </a:prstGeom>
-          <a:ln w="23040">
-            <a:solidFill>
-              <a:srgbClr val="C49645"/>
-            </a:solidFill>
-          </a:ln>
-        </p:spPr>
-      </p:cxnSp>
-      <p:cxnSp>
-        <p:nvCxnSpPr>
-          <p:cNvPr id="34" name="Connector 33"/>
+          <p:cNvPr id="15" name="Connector 14"/>
           <p:cNvCxnSpPr/>
           <p:nvPr/>
         </p:nvCxnSpPr>
         <p:spPr>
           <a:xfrm>
-            <a:off x="2764800" y="1188000"/>
-            <a:ext cx="74880" cy="74880"/>
+            <a:off x="252000" y="1720800"/>
+            <a:ext cx="2736000" cy="0"/>
           </a:xfrm>
           <a:prstGeom prst="line">
             <a:avLst/>
           </a:prstGeom>
-          <a:ln w="23040">
+          <a:ln w="5760">
             <a:solidFill>
-              <a:srgbClr val="C49645"/>
-            </a:solidFill>
-          </a:ln>
-        </p:spPr>
-      </p:cxnSp>
-      <p:cxnSp>
-        <p:nvCxnSpPr>
-          <p:cNvPr id="35" name="Connector 34"/>
-          <p:cNvCxnSpPr/>
-          <p:nvPr/>
-        </p:nvCxnSpPr>
-        <p:spPr>
-          <a:xfrm>
-            <a:off x="2920320" y="1113120"/>
-            <a:ext cx="74880" cy="74880"/>
-          </a:xfrm>
-          <a:prstGeom prst="line">
-            <a:avLst/>
-          </a:prstGeom>
-          <a:ln w="23040">
-            <a:solidFill>
-              <a:srgbClr val="C49645"/>
-            </a:solidFill>
-          </a:ln>
-        </p:spPr>
-      </p:cxnSp>
-      <p:cxnSp>
-        <p:nvCxnSpPr>
-          <p:cNvPr id="36" name="Connector 35"/>
-          <p:cNvCxnSpPr/>
-          <p:nvPr/>
-        </p:nvCxnSpPr>
-        <p:spPr>
-          <a:xfrm flipH="1">
-            <a:off x="2920320" y="1188000"/>
-            <a:ext cx="74880" cy="74880"/>
-          </a:xfrm>
-          <a:prstGeom prst="line">
-            <a:avLst/>
-          </a:prstGeom>
-          <a:ln w="23040">
-            <a:solidFill>
-              <a:srgbClr val="C49645"/>
-            </a:solidFill>
-          </a:ln>
-        </p:spPr>
-      </p:cxnSp>
-      <p:cxnSp>
-        <p:nvCxnSpPr>
-          <p:cNvPr id="37" name="Connector 36"/>
-          <p:cNvCxnSpPr/>
-          <p:nvPr/>
-        </p:nvCxnSpPr>
-        <p:spPr>
-          <a:xfrm flipH="1">
-            <a:off x="2856960" y="1090080"/>
-            <a:ext cx="46080" cy="195840"/>
-          </a:xfrm>
-          <a:prstGeom prst="line">
-            <a:avLst/>
-          </a:prstGeom>
-          <a:ln w="20160">
-            <a:solidFill>
-              <a:srgbClr val="F6EDDD"/>
+              <a:srgbClr val="2A2F38"/>
             </a:solidFill>
           </a:ln>
         </p:spPr>
@@ -4254,7 +3584,7 @@
     <p:bg>
       <p:bgPr>
         <a:solidFill>
-          <a:srgbClr val="FAF6EF"/>
+          <a:srgbClr val="FFFFFF"/>
         </a:solidFill>
         <a:effectLst/>
       </p:bgPr>
@@ -4268,20 +3598,20 @@
       <p:grpSpPr/>
       <p:sp>
         <p:nvSpPr>
-          <p:cNvPr id="2" name="Rectangle 1"/>
+          <p:cNvPr id="2" name="Oval 1"/>
           <p:cNvSpPr/>
           <p:nvPr/>
         </p:nvSpPr>
         <p:spPr>
           <a:xfrm>
-            <a:off x="0" y="0"/>
-            <a:ext cx="1224000" cy="1800000"/>
+            <a:off x="1411200" y="295200"/>
+            <a:ext cx="417600" cy="417600"/>
           </a:xfrm>
-          <a:prstGeom prst="rect">
+          <a:prstGeom prst="ellipse">
             <a:avLst/>
           </a:prstGeom>
           <a:solidFill>
-            <a:srgbClr val="C49645"/>
+            <a:srgbClr val="00D0E0"/>
           </a:solidFill>
           <a:ln>
             <a:noFill/>
@@ -4295,121 +3625,16 @@
           </a:p>
         </p:txBody>
       </p:sp>
-      <p:cxnSp>
-        <p:nvCxnSpPr>
-          <p:cNvPr id="3" name="Connector 2"/>
-          <p:cNvCxnSpPr/>
+      <p:sp>
+        <p:nvSpPr>
+          <p:cNvPr id="3" name="텍스트"/>
+          <p:cNvSpPr txBox="1"/>
           <p:nvPr/>
-        </p:nvCxnSpPr>
-        <p:spPr>
-          <a:xfrm flipH="1">
-            <a:off x="396000" y="759600"/>
-            <a:ext cx="140400" cy="140400"/>
-          </a:xfrm>
-          <a:prstGeom prst="line">
-            <a:avLst/>
-          </a:prstGeom>
-          <a:ln w="43200">
-            <a:solidFill>
-              <a:srgbClr val="FFFFFF"/>
-            </a:solidFill>
-          </a:ln>
-        </p:spPr>
-      </p:cxnSp>
-      <p:cxnSp>
-        <p:nvCxnSpPr>
-          <p:cNvPr id="4" name="Connector 3"/>
-          <p:cNvCxnSpPr/>
-          <p:nvPr/>
-        </p:nvCxnSpPr>
+        </p:nvSpPr>
         <p:spPr>
           <a:xfrm>
-            <a:off x="396000" y="900000"/>
-            <a:ext cx="140400" cy="140400"/>
-          </a:xfrm>
-          <a:prstGeom prst="line">
-            <a:avLst/>
-          </a:prstGeom>
-          <a:ln w="43200">
-            <a:solidFill>
-              <a:srgbClr val="FFFFFF"/>
-            </a:solidFill>
-          </a:ln>
-        </p:spPr>
-      </p:cxnSp>
-      <p:cxnSp>
-        <p:nvCxnSpPr>
-          <p:cNvPr id="5" name="Connector 4"/>
-          <p:cNvCxnSpPr/>
-          <p:nvPr/>
-        </p:nvCxnSpPr>
-        <p:spPr>
-          <a:xfrm>
-            <a:off x="687600" y="759600"/>
-            <a:ext cx="140400" cy="140400"/>
-          </a:xfrm>
-          <a:prstGeom prst="line">
-            <a:avLst/>
-          </a:prstGeom>
-          <a:ln w="43200">
-            <a:solidFill>
-              <a:srgbClr val="FFFFFF"/>
-            </a:solidFill>
-          </a:ln>
-        </p:spPr>
-      </p:cxnSp>
-      <p:cxnSp>
-        <p:nvCxnSpPr>
-          <p:cNvPr id="6" name="Connector 5"/>
-          <p:cNvCxnSpPr/>
-          <p:nvPr/>
-        </p:nvCxnSpPr>
-        <p:spPr>
-          <a:xfrm flipH="1">
-            <a:off x="687600" y="900000"/>
-            <a:ext cx="140400" cy="140400"/>
-          </a:xfrm>
-          <a:prstGeom prst="line">
-            <a:avLst/>
-          </a:prstGeom>
-          <a:ln w="43200">
-            <a:solidFill>
-              <a:srgbClr val="FFFFFF"/>
-            </a:solidFill>
-          </a:ln>
-        </p:spPr>
-      </p:cxnSp>
-      <p:cxnSp>
-        <p:nvCxnSpPr>
-          <p:cNvPr id="7" name="Connector 6"/>
-          <p:cNvCxnSpPr/>
-          <p:nvPr/>
-        </p:nvCxnSpPr>
-        <p:spPr>
-          <a:xfrm flipH="1">
-            <a:off x="568800" y="716400"/>
-            <a:ext cx="86400" cy="367200"/>
-          </a:xfrm>
-          <a:prstGeom prst="line">
-            <a:avLst/>
-          </a:prstGeom>
-          <a:ln w="37800">
-            <a:solidFill>
-              <a:srgbClr val="808080"/>
-            </a:solidFill>
-          </a:ln>
-        </p:spPr>
-      </p:cxnSp>
-      <p:sp>
-        <p:nvSpPr>
-          <p:cNvPr id="8" name="텍스트"/>
-          <p:cNvSpPr txBox="1"/>
-          <p:nvPr/>
-        </p:nvSpPr>
-        <p:spPr>
-          <a:xfrm>
-            <a:off x="1440000" y="432000"/>
-            <a:ext cx="1584000" cy="792000"/>
+            <a:off x="1368000" y="324000"/>
+            <a:ext cx="504000" cy="360000"/>
           </a:xfrm>
           <a:prstGeom prst="rect">
             <a:avLst/>
@@ -4422,80 +3647,34 @@
           </a:bodyPr>
           <a:lstStyle/>
           <a:p>
-            <a:pPr algn="l">
+            <a:pPr algn="ctr">
               <a:lnSpc>
-                <a:spcPts val="1667"/>
+                <a:spcPts val="3769"/>
               </a:lnSpc>
             </a:pPr>
             <a:r>
-              <a:rPr sz="1150" b="1">
+              <a:rPr sz="2600" b="1">
                 <a:solidFill>
-                  <a:srgbClr val="7C5D27"/>
+                  <a:srgbClr val="12151C"/>
                 </a:solidFill>
                 <a:latin typeface="맑은 고딕"/>
                 <a:ea typeface="맑은 고딕"/>
               </a:rPr>
-              <a:t>내일의 도구를</a:t>
-            </a:r>
-          </a:p>
-          <a:p>
-            <a:pPr algn="l">
-              <a:lnSpc>
-                <a:spcPts val="1667"/>
-              </a:lnSpc>
-            </a:pPr>
-            <a:r>
-              <a:rPr sz="1150" b="1">
-                <a:solidFill>
-                  <a:srgbClr val="7C5D27"/>
-                </a:solidFill>
-                <a:latin typeface="맑은 고딕"/>
-                <a:ea typeface="맑은 고딕"/>
-              </a:rPr>
-              <a:t>오늘 익힙니다</a:t>
-            </a:r>
-          </a:p>
-        </p:txBody>
-      </p:sp>
-      <p:sp>
-        <p:nvSpPr>
-          <p:cNvPr id="9" name="Rectangle 8"/>
-          <p:cNvSpPr/>
+              <a:t>소</a:t>
+            </a:r>
+          </a:p>
+        </p:txBody>
+      </p:sp>
+      <p:sp>
+        <p:nvSpPr>
+          <p:cNvPr id="4" name="텍스트"/>
+          <p:cNvSpPr txBox="1"/>
           <p:nvPr/>
         </p:nvSpPr>
         <p:spPr>
           <a:xfrm>
-            <a:off x="1440000" y="1317600"/>
-            <a:ext cx="180000" cy="10800"/>
-          </a:xfrm>
-          <a:prstGeom prst="rect">
-            <a:avLst/>
-          </a:prstGeom>
-          <a:solidFill>
-            <a:srgbClr val="C49645"/>
-          </a:solidFill>
-          <a:ln>
-            <a:noFill/>
-          </a:ln>
-        </p:spPr>
-        <p:txBody>
-          <a:bodyPr rtlCol="0" anchor="ctr"/>
-          <a:lstStyle/>
-          <a:p>
-            <a:pPr algn="ctr"/>
-          </a:p>
-        </p:txBody>
-      </p:sp>
-      <p:sp>
-        <p:nvSpPr>
-          <p:cNvPr id="10" name="텍스트"/>
-          <p:cNvSpPr txBox="1"/>
-          <p:nvPr/>
-        </p:nvSpPr>
-        <p:spPr>
-          <a:xfrm>
-            <a:off x="1440000" y="1418400"/>
-            <a:ext cx="1584000" cy="108000"/>
+            <a:off x="360000" y="820800"/>
+            <a:ext cx="2520000" cy="161926"/>
           </a:xfrm>
           <a:prstGeom prst="rect">
             <a:avLst/>
@@ -4508,20 +3687,89 @@
           </a:bodyPr>
           <a:lstStyle/>
           <a:p>
-            <a:pPr algn="l">
+            <a:pPr algn="ctr">
               <a:lnSpc>
-                <a:spcPts val="1087"/>
+                <a:spcPts val="1232"/>
               </a:lnSpc>
             </a:pPr>
             <a:r>
-              <a:rPr sz="750" b="1" spc="200">
+              <a:rPr sz="850" b="1" spc="200">
                 <a:solidFill>
-                  <a:srgbClr val="7E6E52"/>
+                  <a:srgbClr val="12151C"/>
                 </a:solidFill>
                 <a:latin typeface="맑은 고딕"/>
                 <a:ea typeface="맑은 고딕"/>
               </a:rPr>
               <a:t>소속 · 브랜드</a:t>
+            </a:r>
+          </a:p>
+        </p:txBody>
+      </p:sp>
+      <p:sp>
+        <p:nvSpPr>
+          <p:cNvPr id="5" name="Rectangle 4"/>
+          <p:cNvSpPr/>
+          <p:nvPr/>
+        </p:nvSpPr>
+        <p:spPr>
+          <a:xfrm>
+            <a:off x="1530000" y="1051200"/>
+            <a:ext cx="180000" cy="14400"/>
+          </a:xfrm>
+          <a:prstGeom prst="rect">
+            <a:avLst/>
+          </a:prstGeom>
+          <a:solidFill>
+            <a:srgbClr val="00D0E0"/>
+          </a:solidFill>
+          <a:ln>
+            <a:noFill/>
+          </a:ln>
+        </p:spPr>
+        <p:txBody>
+          <a:bodyPr rtlCol="0" anchor="ctr"/>
+          <a:lstStyle/>
+          <a:p>
+            <a:pPr algn="ctr"/>
+          </a:p>
+        </p:txBody>
+      </p:sp>
+      <p:sp>
+        <p:nvSpPr>
+          <p:cNvPr id="6" name="텍스트"/>
+          <p:cNvSpPr txBox="1"/>
+          <p:nvPr/>
+        </p:nvSpPr>
+        <p:spPr>
+          <a:xfrm>
+            <a:off x="540000" y="1188000"/>
+            <a:ext cx="2160000" cy="360000"/>
+          </a:xfrm>
+          <a:prstGeom prst="rect">
+            <a:avLst/>
+          </a:prstGeom>
+          <a:noFill/>
+        </p:spPr>
+        <p:txBody>
+          <a:bodyPr wrap="square" lIns="0" rIns="0" tIns="0" bIns="0" anchor="t">
+            <a:spAutoFit/>
+          </a:bodyPr>
+          <a:lstStyle/>
+          <a:p>
+            <a:pPr algn="ctr">
+              <a:lnSpc>
+                <a:spcPts val="1305"/>
+              </a:lnSpc>
+            </a:pPr>
+            <a:r>
+              <a:rPr sz="900" b="1">
+                <a:solidFill>
+                  <a:srgbClr val="6B7280"/>
+                </a:solidFill>
+                <a:latin typeface="맑은 고딕"/>
+                <a:ea typeface="맑은 고딕"/>
+              </a:rPr>
+              <a:t>내일의 도구를 오늘 익힙니다</a:t>
             </a:r>
           </a:p>
         </p:txBody>

--- a/public/fun/cards/expert/expert-20.pptx
+++ b/public/fun/cards/expert/expert-20.pptx
@@ -3105,8 +3105,8 @@
         </p:nvSpPr>
         <p:spPr>
           <a:xfrm>
-            <a:off x="252000" y="144000"/>
-            <a:ext cx="201600" cy="21600"/>
+            <a:off x="0" y="0"/>
+            <a:ext cx="3240000" cy="36000"/>
           </a:xfrm>
           <a:prstGeom prst="rect">
             <a:avLst/>
@@ -3134,8 +3134,8 @@
         </p:nvSpPr>
         <p:spPr>
           <a:xfrm>
-            <a:off x="252000" y="273600"/>
-            <a:ext cx="2160000" cy="360000"/>
+            <a:off x="252000" y="223200"/>
+            <a:ext cx="1296000" cy="237600"/>
           </a:xfrm>
           <a:prstGeom prst="rect">
             <a:avLst/>
@@ -3150,11 +3150,11 @@
           <a:p>
             <a:pPr algn="l">
               <a:lnSpc>
-                <a:spcPts val="3190"/>
+                <a:spcPts val="1957"/>
               </a:lnSpc>
             </a:pPr>
             <a:r>
-              <a:rPr sz="2200" b="1">
+              <a:rPr sz="1350" b="1" spc="120">
                 <a:solidFill>
                   <a:srgbClr val="FFFFFF"/>
                 </a:solidFill>
@@ -3174,8 +3174,8 @@
         </p:nvSpPr>
         <p:spPr>
           <a:xfrm>
-            <a:off x="252000" y="676800"/>
-            <a:ext cx="2160000" cy="171451"/>
+            <a:off x="252000" y="475200"/>
+            <a:ext cx="1296000" cy="133351"/>
           </a:xfrm>
           <a:prstGeom prst="rect">
             <a:avLst/>
@@ -3190,11 +3190,11 @@
           <a:p>
             <a:pPr algn="l">
               <a:lnSpc>
-                <a:spcPts val="1305"/>
+                <a:spcPts val="1015"/>
               </a:lnSpc>
             </a:pPr>
             <a:r>
-              <a:rPr sz="900" b="0">
+              <a:rPr sz="700" b="0">
                 <a:solidFill>
                   <a:srgbClr val="A3A9B5"/>
                 </a:solidFill>
@@ -3214,7 +3214,7 @@
         </p:nvSpPr>
         <p:spPr>
           <a:xfrm>
-            <a:off x="1548000" y="230400"/>
+            <a:off x="1548000" y="259200"/>
             <a:ext cx="1440000" cy="123826"/>
           </a:xfrm>
           <a:prstGeom prst="rect">
@@ -3234,7 +3234,7 @@
               </a:lnSpc>
             </a:pPr>
             <a:r>
-              <a:rPr sz="650" b="1" spc="200">
+              <a:rPr sz="650" b="1" spc="220">
                 <a:solidFill>
                   <a:srgbClr val="A3A9B5"/>
                 </a:solidFill>
@@ -3254,13 +3254,13 @@
         </p:nvCxnSpPr>
         <p:spPr>
           <a:xfrm>
-            <a:off x="252000" y="1051200"/>
+            <a:off x="252000" y="907200"/>
             <a:ext cx="2736000" cy="0"/>
           </a:xfrm>
           <a:prstGeom prst="line">
             <a:avLst/>
           </a:prstGeom>
-          <a:ln w="5760">
+          <a:ln w="3600">
             <a:solidFill>
               <a:srgbClr val="2A2F38"/>
             </a:solidFill>
@@ -3275,8 +3275,8 @@
         </p:nvSpPr>
         <p:spPr>
           <a:xfrm>
-            <a:off x="252000" y="1123200"/>
-            <a:ext cx="576000" cy="99061"/>
+            <a:off x="252000" y="986400"/>
+            <a:ext cx="576000" cy="91441"/>
           </a:xfrm>
           <a:prstGeom prst="rect">
             <a:avLst/>
@@ -3291,11 +3291,11 @@
           <a:p>
             <a:pPr algn="l">
               <a:lnSpc>
-                <a:spcPts val="754"/>
+                <a:spcPts val="696"/>
               </a:lnSpc>
             </a:pPr>
             <a:r>
-              <a:rPr sz="520" b="1" spc="150">
+              <a:rPr sz="480" b="1" spc="160">
                 <a:solidFill>
                   <a:srgbClr val="A3A9B5"/>
                 </a:solidFill>
@@ -3315,8 +3315,8 @@
         </p:nvSpPr>
         <p:spPr>
           <a:xfrm>
-            <a:off x="900000" y="1101600"/>
-            <a:ext cx="2088000" cy="142876"/>
+            <a:off x="936000" y="968400"/>
+            <a:ext cx="2052000" cy="133351"/>
           </a:xfrm>
           <a:prstGeom prst="rect">
             <a:avLst/>
@@ -3331,11 +3331,11 @@
           <a:p>
             <a:pPr algn="l">
               <a:lnSpc>
-                <a:spcPts val="1087"/>
+                <a:spcPts val="1015"/>
               </a:lnSpc>
             </a:pPr>
             <a:r>
-              <a:rPr sz="750" b="0">
+              <a:rPr sz="700" b="0">
                 <a:solidFill>
                   <a:srgbClr val="FFFFFF"/>
                 </a:solidFill>
@@ -3355,13 +3355,13 @@
         </p:nvCxnSpPr>
         <p:spPr>
           <a:xfrm>
-            <a:off x="252000" y="1274400"/>
+            <a:off x="252000" y="1137600"/>
             <a:ext cx="2736000" cy="0"/>
           </a:xfrm>
           <a:prstGeom prst="line">
             <a:avLst/>
           </a:prstGeom>
-          <a:ln w="5760">
+          <a:ln w="3600">
             <a:solidFill>
               <a:srgbClr val="2A2F38"/>
             </a:solidFill>
@@ -3376,8 +3376,8 @@
         </p:nvSpPr>
         <p:spPr>
           <a:xfrm>
-            <a:off x="252000" y="1346400"/>
-            <a:ext cx="576000" cy="99061"/>
+            <a:off x="252000" y="1216800"/>
+            <a:ext cx="576000" cy="91441"/>
           </a:xfrm>
           <a:prstGeom prst="rect">
             <a:avLst/>
@@ -3392,11 +3392,11 @@
           <a:p>
             <a:pPr algn="l">
               <a:lnSpc>
-                <a:spcPts val="754"/>
+                <a:spcPts val="696"/>
               </a:lnSpc>
             </a:pPr>
             <a:r>
-              <a:rPr sz="520" b="1" spc="150">
+              <a:rPr sz="480" b="1" spc="160">
                 <a:solidFill>
                   <a:srgbClr val="A3A9B5"/>
                 </a:solidFill>
@@ -3416,8 +3416,8 @@
         </p:nvSpPr>
         <p:spPr>
           <a:xfrm>
-            <a:off x="900000" y="1324800"/>
-            <a:ext cx="2088000" cy="142876"/>
+            <a:off x="936000" y="1198800"/>
+            <a:ext cx="2052000" cy="133351"/>
           </a:xfrm>
           <a:prstGeom prst="rect">
             <a:avLst/>
@@ -3432,11 +3432,11 @@
           <a:p>
             <a:pPr algn="l">
               <a:lnSpc>
-                <a:spcPts val="1087"/>
+                <a:spcPts val="1015"/>
               </a:lnSpc>
             </a:pPr>
             <a:r>
-              <a:rPr sz="750" b="0">
+              <a:rPr sz="700" b="0">
                 <a:solidFill>
                   <a:srgbClr val="FFFFFF"/>
                 </a:solidFill>
@@ -3456,13 +3456,13 @@
         </p:nvCxnSpPr>
         <p:spPr>
           <a:xfrm>
-            <a:off x="252000" y="1497600"/>
+            <a:off x="252000" y="1368000"/>
             <a:ext cx="2736000" cy="0"/>
           </a:xfrm>
           <a:prstGeom prst="line">
             <a:avLst/>
           </a:prstGeom>
-          <a:ln w="5760">
+          <a:ln w="3600">
             <a:solidFill>
               <a:srgbClr val="2A2F38"/>
             </a:solidFill>
@@ -3477,8 +3477,8 @@
         </p:nvSpPr>
         <p:spPr>
           <a:xfrm>
-            <a:off x="252000" y="1569600"/>
-            <a:ext cx="576000" cy="99061"/>
+            <a:off x="252000" y="1447200"/>
+            <a:ext cx="576000" cy="91441"/>
           </a:xfrm>
           <a:prstGeom prst="rect">
             <a:avLst/>
@@ -3493,11 +3493,11 @@
           <a:p>
             <a:pPr algn="l">
               <a:lnSpc>
-                <a:spcPts val="754"/>
+                <a:spcPts val="696"/>
               </a:lnSpc>
             </a:pPr>
             <a:r>
-              <a:rPr sz="520" b="1" spc="150">
+              <a:rPr sz="480" b="1" spc="160">
                 <a:solidFill>
                   <a:srgbClr val="A3A9B5"/>
                 </a:solidFill>
@@ -3517,8 +3517,8 @@
         </p:nvSpPr>
         <p:spPr>
           <a:xfrm>
-            <a:off x="900000" y="1548000"/>
-            <a:ext cx="2088000" cy="142876"/>
+            <a:off x="936000" y="1429200"/>
+            <a:ext cx="2052000" cy="133351"/>
           </a:xfrm>
           <a:prstGeom prst="rect">
             <a:avLst/>
@@ -3533,11 +3533,11 @@
           <a:p>
             <a:pPr algn="l">
               <a:lnSpc>
-                <a:spcPts val="1087"/>
+                <a:spcPts val="1015"/>
               </a:lnSpc>
             </a:pPr>
             <a:r>
-              <a:rPr sz="750" b="0">
+              <a:rPr sz="700" b="0">
                 <a:solidFill>
                   <a:srgbClr val="FFFFFF"/>
                 </a:solidFill>
@@ -3557,13 +3557,13 @@
         </p:nvCxnSpPr>
         <p:spPr>
           <a:xfrm>
-            <a:off x="252000" y="1720800"/>
+            <a:off x="252000" y="1598400"/>
             <a:ext cx="2736000" cy="0"/>
           </a:xfrm>
           <a:prstGeom prst="line">
             <a:avLst/>
           </a:prstGeom>
-          <a:ln w="5760">
+          <a:ln w="3600">
             <a:solidFill>
               <a:srgbClr val="2A2F38"/>
             </a:solidFill>
@@ -3598,43 +3598,14 @@
       <p:grpSpPr/>
       <p:sp>
         <p:nvSpPr>
-          <p:cNvPr id="2" name="Oval 1"/>
-          <p:cNvSpPr/>
-          <p:nvPr/>
-        </p:nvSpPr>
-        <p:spPr>
-          <a:xfrm>
-            <a:off x="1411200" y="295200"/>
-            <a:ext cx="417600" cy="417600"/>
-          </a:xfrm>
-          <a:prstGeom prst="ellipse">
-            <a:avLst/>
-          </a:prstGeom>
-          <a:solidFill>
-            <a:srgbClr val="00D0E0"/>
-          </a:solidFill>
-          <a:ln>
-            <a:noFill/>
-          </a:ln>
-        </p:spPr>
-        <p:txBody>
-          <a:bodyPr rtlCol="0" anchor="ctr"/>
-          <a:lstStyle/>
-          <a:p>
-            <a:pPr algn="ctr"/>
-          </a:p>
-        </p:txBody>
-      </p:sp>
-      <p:sp>
-        <p:nvSpPr>
-          <p:cNvPr id="3" name="텍스트"/>
+          <p:cNvPr id="2" name="텍스트"/>
           <p:cNvSpPr txBox="1"/>
           <p:nvPr/>
         </p:nvSpPr>
         <p:spPr>
           <a:xfrm>
-            <a:off x="1368000" y="324000"/>
-            <a:ext cx="504000" cy="360000"/>
+            <a:off x="252000" y="252000"/>
+            <a:ext cx="1080000" cy="99061"/>
           </a:xfrm>
           <a:prstGeom prst="rect">
             <a:avLst/>
@@ -3642,79 +3613,39 @@
           <a:noFill/>
         </p:spPr>
         <p:txBody>
-          <a:bodyPr wrap="square" lIns="0" rIns="0" tIns="0" bIns="0" anchor="ctr">
+          <a:bodyPr wrap="square" lIns="0" rIns="0" tIns="0" bIns="0" anchor="t">
             <a:spAutoFit/>
           </a:bodyPr>
           <a:lstStyle/>
           <a:p>
-            <a:pPr algn="ctr">
+            <a:pPr algn="l">
               <a:lnSpc>
-                <a:spcPts val="3769"/>
+                <a:spcPts val="754"/>
               </a:lnSpc>
             </a:pPr>
             <a:r>
-              <a:rPr sz="2600" b="1">
+              <a:rPr sz="520" b="1" spc="240">
                 <a:solidFill>
-                  <a:srgbClr val="12151C"/>
+                  <a:srgbClr val="6B7280"/>
                 </a:solidFill>
                 <a:latin typeface="맑은 고딕"/>
                 <a:ea typeface="맑은 고딕"/>
               </a:rPr>
-              <a:t>소</a:t>
-            </a:r>
-          </a:p>
-        </p:txBody>
-      </p:sp>
-      <p:sp>
-        <p:nvSpPr>
-          <p:cNvPr id="4" name="텍스트"/>
-          <p:cNvSpPr txBox="1"/>
-          <p:nvPr/>
-        </p:nvSpPr>
-        <p:spPr>
-          <a:xfrm>
-            <a:off x="360000" y="820800"/>
-            <a:ext cx="2520000" cy="161926"/>
-          </a:xfrm>
-          <a:prstGeom prst="rect">
-            <a:avLst/>
-          </a:prstGeom>
-          <a:noFill/>
-        </p:spPr>
-        <p:txBody>
-          <a:bodyPr wrap="square" lIns="0" rIns="0" tIns="0" bIns="0" anchor="t">
-            <a:spAutoFit/>
-          </a:bodyPr>
-          <a:lstStyle/>
-          <a:p>
-            <a:pPr algn="ctr">
-              <a:lnSpc>
-                <a:spcPts val="1232"/>
-              </a:lnSpc>
-            </a:pPr>
-            <a:r>
-              <a:rPr sz="850" b="1" spc="200">
-                <a:solidFill>
-                  <a:srgbClr val="12151C"/>
-                </a:solidFill>
-                <a:latin typeface="맑은 고딕"/>
-                <a:ea typeface="맑은 고딕"/>
-              </a:rPr>
-              <a:t>소속 · 브랜드</a:t>
-            </a:r>
-          </a:p>
-        </p:txBody>
-      </p:sp>
-      <p:sp>
-        <p:nvSpPr>
-          <p:cNvPr id="5" name="Rectangle 4"/>
+              <a:t>전문 분야</a:t>
+            </a:r>
+          </a:p>
+        </p:txBody>
+      </p:sp>
+      <p:sp>
+        <p:nvSpPr>
+          <p:cNvPr id="3" name="Rectangle 2"/>
           <p:cNvSpPr/>
           <p:nvPr/>
         </p:nvSpPr>
         <p:spPr>
           <a:xfrm>
-            <a:off x="1530000" y="1051200"/>
-            <a:ext cx="180000" cy="14400"/>
+            <a:off x="252000" y="367200"/>
+            <a:ext cx="108000" cy="14400"/>
           </a:xfrm>
           <a:prstGeom prst="rect">
             <a:avLst/>
@@ -3736,14 +3667,45 @@
       </p:sp>
       <p:sp>
         <p:nvSpPr>
-          <p:cNvPr id="6" name="텍스트"/>
+          <p:cNvPr id="4" name="Rounded Rectangle 3"/>
+          <p:cNvSpPr/>
+          <p:nvPr/>
+        </p:nvSpPr>
+        <p:spPr>
+          <a:xfrm>
+            <a:off x="252000" y="540000"/>
+            <a:ext cx="496933" cy="194361"/>
+          </a:xfrm>
+          <a:prstGeom prst="roundRect">
+            <a:avLst>
+              <a:gd name="adj" fmla="val 50000"/>
+            </a:avLst>
+          </a:prstGeom>
+          <a:noFill/>
+          <a:ln w="3600">
+            <a:solidFill>
+              <a:srgbClr val="6B7280"/>
+            </a:solidFill>
+          </a:ln>
+        </p:spPr>
+        <p:txBody>
+          <a:bodyPr rtlCol="0" anchor="ctr"/>
+          <a:lstStyle/>
+          <a:p>
+            <a:pPr algn="ctr"/>
+          </a:p>
+        </p:txBody>
+      </p:sp>
+      <p:sp>
+        <p:nvSpPr>
+          <p:cNvPr id="5" name="텍스트"/>
           <p:cNvSpPr txBox="1"/>
           <p:nvPr/>
         </p:nvSpPr>
         <p:spPr>
           <a:xfrm>
-            <a:off x="540000" y="1188000"/>
-            <a:ext cx="2160000" cy="360000"/>
+            <a:off x="252000" y="540000"/>
+            <a:ext cx="496933" cy="194361"/>
           </a:xfrm>
           <a:prstGeom prst="rect">
             <a:avLst/>
@@ -3751,25 +3713,459 @@
           <a:noFill/>
         </p:spPr>
         <p:txBody>
+          <a:bodyPr wrap="square" lIns="0" rIns="0" tIns="0" bIns="0" anchor="ctr">
+            <a:spAutoFit/>
+          </a:bodyPr>
+          <a:lstStyle/>
+          <a:p>
+            <a:pPr algn="ctr">
+              <a:lnSpc>
+                <a:spcPts val="986"/>
+              </a:lnSpc>
+            </a:pPr>
+            <a:r>
+              <a:rPr sz="680" b="0">
+                <a:solidFill>
+                  <a:srgbClr val="12151C"/>
+                </a:solidFill>
+                <a:latin typeface="맑은 고딕"/>
+                <a:ea typeface="맑은 고딕"/>
+              </a:rPr>
+              <a:t>웹 개발</a:t>
+            </a:r>
+          </a:p>
+        </p:txBody>
+      </p:sp>
+      <p:sp>
+        <p:nvSpPr>
+          <p:cNvPr id="6" name="Rounded Rectangle 5"/>
+          <p:cNvSpPr/>
+          <p:nvPr/>
+        </p:nvSpPr>
+        <p:spPr>
+          <a:xfrm>
+            <a:off x="799333" y="540000"/>
+            <a:ext cx="581567" cy="194361"/>
+          </a:xfrm>
+          <a:prstGeom prst="roundRect">
+            <a:avLst>
+              <a:gd name="adj" fmla="val 50000"/>
+            </a:avLst>
+          </a:prstGeom>
+          <a:noFill/>
+          <a:ln w="3600">
+            <a:solidFill>
+              <a:srgbClr val="6B7280"/>
+            </a:solidFill>
+          </a:ln>
+        </p:spPr>
+        <p:txBody>
+          <a:bodyPr rtlCol="0" anchor="ctr"/>
+          <a:lstStyle/>
+          <a:p>
+            <a:pPr algn="ctr"/>
+          </a:p>
+        </p:txBody>
+      </p:sp>
+      <p:sp>
+        <p:nvSpPr>
+          <p:cNvPr id="7" name="텍스트"/>
+          <p:cNvSpPr txBox="1"/>
+          <p:nvPr/>
+        </p:nvSpPr>
+        <p:spPr>
+          <a:xfrm>
+            <a:off x="799333" y="540000"/>
+            <a:ext cx="581567" cy="194361"/>
+          </a:xfrm>
+          <a:prstGeom prst="rect">
+            <a:avLst/>
+          </a:prstGeom>
+          <a:noFill/>
+        </p:spPr>
+        <p:txBody>
+          <a:bodyPr wrap="square" lIns="0" rIns="0" tIns="0" bIns="0" anchor="ctr">
+            <a:spAutoFit/>
+          </a:bodyPr>
+          <a:lstStyle/>
+          <a:p>
+            <a:pPr algn="ctr">
+              <a:lnSpc>
+                <a:spcPts val="986"/>
+              </a:lnSpc>
+            </a:pPr>
+            <a:r>
+              <a:rPr sz="680" b="0">
+                <a:solidFill>
+                  <a:srgbClr val="12151C"/>
+                </a:solidFill>
+                <a:latin typeface="맑은 고딕"/>
+                <a:ea typeface="맑은 고딕"/>
+              </a:rPr>
+              <a:t>카피라이팅</a:t>
+            </a:r>
+          </a:p>
+        </p:txBody>
+      </p:sp>
+      <p:sp>
+        <p:nvSpPr>
+          <p:cNvPr id="8" name="Rounded Rectangle 7"/>
+          <p:cNvSpPr/>
+          <p:nvPr/>
+        </p:nvSpPr>
+        <p:spPr>
+          <a:xfrm>
+            <a:off x="1431300" y="540000"/>
+            <a:ext cx="412300" cy="194361"/>
+          </a:xfrm>
+          <a:prstGeom prst="roundRect">
+            <a:avLst>
+              <a:gd name="adj" fmla="val 50000"/>
+            </a:avLst>
+          </a:prstGeom>
+          <a:noFill/>
+          <a:ln w="3600">
+            <a:solidFill>
+              <a:srgbClr val="6B7280"/>
+            </a:solidFill>
+          </a:ln>
+        </p:spPr>
+        <p:txBody>
+          <a:bodyPr rtlCol="0" anchor="ctr"/>
+          <a:lstStyle/>
+          <a:p>
+            <a:pPr algn="ctr"/>
+          </a:p>
+        </p:txBody>
+      </p:sp>
+      <p:sp>
+        <p:nvSpPr>
+          <p:cNvPr id="9" name="텍스트"/>
+          <p:cNvSpPr txBox="1"/>
+          <p:nvPr/>
+        </p:nvSpPr>
+        <p:spPr>
+          <a:xfrm>
+            <a:off x="1431300" y="540000"/>
+            <a:ext cx="412300" cy="194361"/>
+          </a:xfrm>
+          <a:prstGeom prst="rect">
+            <a:avLst/>
+          </a:prstGeom>
+          <a:noFill/>
+        </p:spPr>
+        <p:txBody>
+          <a:bodyPr wrap="square" lIns="0" rIns="0" tIns="0" bIns="0" anchor="ctr">
+            <a:spAutoFit/>
+          </a:bodyPr>
+          <a:lstStyle/>
+          <a:p>
+            <a:pPr algn="ctr">
+              <a:lnSpc>
+                <a:spcPts val="986"/>
+              </a:lnSpc>
+            </a:pPr>
+            <a:r>
+              <a:rPr sz="680" b="0">
+                <a:solidFill>
+                  <a:srgbClr val="12151C"/>
+                </a:solidFill>
+                <a:latin typeface="맑은 고딕"/>
+                <a:ea typeface="맑은 고딕"/>
+              </a:rPr>
+              <a:t>컨설팅</a:t>
+            </a:r>
+          </a:p>
+        </p:txBody>
+      </p:sp>
+      <p:sp>
+        <p:nvSpPr>
+          <p:cNvPr id="10" name="Rounded Rectangle 9"/>
+          <p:cNvSpPr/>
+          <p:nvPr/>
+        </p:nvSpPr>
+        <p:spPr>
+          <a:xfrm>
+            <a:off x="1894000" y="540000"/>
+            <a:ext cx="581567" cy="194361"/>
+          </a:xfrm>
+          <a:prstGeom prst="roundRect">
+            <a:avLst>
+              <a:gd name="adj" fmla="val 50000"/>
+            </a:avLst>
+          </a:prstGeom>
+          <a:noFill/>
+          <a:ln w="3600">
+            <a:solidFill>
+              <a:srgbClr val="6B7280"/>
+            </a:solidFill>
+          </a:ln>
+        </p:spPr>
+        <p:txBody>
+          <a:bodyPr rtlCol="0" anchor="ctr"/>
+          <a:lstStyle/>
+          <a:p>
+            <a:pPr algn="ctr"/>
+          </a:p>
+        </p:txBody>
+      </p:sp>
+      <p:sp>
+        <p:nvSpPr>
+          <p:cNvPr id="11" name="텍스트"/>
+          <p:cNvSpPr txBox="1"/>
+          <p:nvPr/>
+        </p:nvSpPr>
+        <p:spPr>
+          <a:xfrm>
+            <a:off x="1894000" y="540000"/>
+            <a:ext cx="581567" cy="194361"/>
+          </a:xfrm>
+          <a:prstGeom prst="rect">
+            <a:avLst/>
+          </a:prstGeom>
+          <a:noFill/>
+        </p:spPr>
+        <p:txBody>
+          <a:bodyPr wrap="square" lIns="0" rIns="0" tIns="0" bIns="0" anchor="ctr">
+            <a:spAutoFit/>
+          </a:bodyPr>
+          <a:lstStyle/>
+          <a:p>
+            <a:pPr algn="ctr">
+              <a:lnSpc>
+                <a:spcPts val="986"/>
+              </a:lnSpc>
+            </a:pPr>
+            <a:r>
+              <a:rPr sz="680" b="0">
+                <a:solidFill>
+                  <a:srgbClr val="12151C"/>
+                </a:solidFill>
+                <a:latin typeface="맑은 고딕"/>
+                <a:ea typeface="맑은 고딕"/>
+              </a:rPr>
+              <a:t>외주 문의</a:t>
+            </a:r>
+          </a:p>
+        </p:txBody>
+      </p:sp>
+      <p:cxnSp>
+        <p:nvCxnSpPr>
+          <p:cNvPr id="12" name="Connector 11"/>
+          <p:cNvCxnSpPr/>
+          <p:nvPr/>
+        </p:nvCxnSpPr>
+        <p:spPr>
+          <a:xfrm>
+            <a:off x="252000" y="1339200"/>
+            <a:ext cx="2736000" cy="0"/>
+          </a:xfrm>
+          <a:prstGeom prst="line">
+            <a:avLst/>
+          </a:prstGeom>
+          <a:ln w="3600">
+            <a:solidFill>
+              <a:srgbClr val="E3E5E9"/>
+            </a:solidFill>
+          </a:ln>
+        </p:spPr>
+      </p:cxnSp>
+      <p:sp>
+        <p:nvSpPr>
+          <p:cNvPr id="13" name="텍스트"/>
+          <p:cNvSpPr txBox="1"/>
+          <p:nvPr/>
+        </p:nvSpPr>
+        <p:spPr>
+          <a:xfrm>
+            <a:off x="252000" y="1422000"/>
+            <a:ext cx="396000" cy="91441"/>
+          </a:xfrm>
+          <a:prstGeom prst="rect">
+            <a:avLst/>
+          </a:prstGeom>
+          <a:noFill/>
+        </p:spPr>
+        <p:txBody>
           <a:bodyPr wrap="square" lIns="0" rIns="0" tIns="0" bIns="0" anchor="t">
             <a:spAutoFit/>
           </a:bodyPr>
           <a:lstStyle/>
           <a:p>
-            <a:pPr algn="ctr">
+            <a:pPr algn="l">
               <a:lnSpc>
-                <a:spcPts val="1305"/>
+                <a:spcPts val="696"/>
               </a:lnSpc>
             </a:pPr>
             <a:r>
-              <a:rPr sz="900" b="1">
+              <a:rPr sz="480" b="1" spc="140">
                 <a:solidFill>
                   <a:srgbClr val="6B7280"/>
                 </a:solidFill>
                 <a:latin typeface="맑은 고딕"/>
                 <a:ea typeface="맑은 고딕"/>
               </a:rPr>
-              <a:t>내일의 도구를 오늘 익힙니다</a:t>
+              <a:t>HOURS</a:t>
+            </a:r>
+          </a:p>
+        </p:txBody>
+      </p:sp>
+      <p:sp>
+        <p:nvSpPr>
+          <p:cNvPr id="14" name="텍스트"/>
+          <p:cNvSpPr txBox="1"/>
+          <p:nvPr/>
+        </p:nvSpPr>
+        <p:spPr>
+          <a:xfrm>
+            <a:off x="648000" y="1411200"/>
+            <a:ext cx="2340000" cy="121921"/>
+          </a:xfrm>
+          <a:prstGeom prst="rect">
+            <a:avLst/>
+          </a:prstGeom>
+          <a:noFill/>
+        </p:spPr>
+        <p:txBody>
+          <a:bodyPr wrap="square" lIns="0" rIns="0" tIns="0" bIns="0" anchor="t">
+            <a:spAutoFit/>
+          </a:bodyPr>
+          <a:lstStyle/>
+          <a:p>
+            <a:pPr algn="l">
+              <a:lnSpc>
+                <a:spcPts val="927"/>
+              </a:lnSpc>
+            </a:pPr>
+            <a:r>
+              <a:rPr sz="640" b="0">
+                <a:solidFill>
+                  <a:srgbClr val="12151C"/>
+                </a:solidFill>
+                <a:latin typeface="맑은 고딕"/>
+                <a:ea typeface="맑은 고딕"/>
+              </a:rPr>
+              <a:t>평일 10:00 – 18:00</a:t>
+            </a:r>
+          </a:p>
+        </p:txBody>
+      </p:sp>
+      <p:sp>
+        <p:nvSpPr>
+          <p:cNvPr id="15" name="텍스트"/>
+          <p:cNvSpPr txBox="1"/>
+          <p:nvPr/>
+        </p:nvSpPr>
+        <p:spPr>
+          <a:xfrm>
+            <a:off x="252000" y="1580400"/>
+            <a:ext cx="396000" cy="91441"/>
+          </a:xfrm>
+          <a:prstGeom prst="rect">
+            <a:avLst/>
+          </a:prstGeom>
+          <a:noFill/>
+        </p:spPr>
+        <p:txBody>
+          <a:bodyPr wrap="square" lIns="0" rIns="0" tIns="0" bIns="0" anchor="t">
+            <a:spAutoFit/>
+          </a:bodyPr>
+          <a:lstStyle/>
+          <a:p>
+            <a:pPr algn="l">
+              <a:lnSpc>
+                <a:spcPts val="696"/>
+              </a:lnSpc>
+            </a:pPr>
+            <a:r>
+              <a:rPr sz="480" b="1" spc="140">
+                <a:solidFill>
+                  <a:srgbClr val="6B7280"/>
+                </a:solidFill>
+                <a:latin typeface="맑은 고딕"/>
+                <a:ea typeface="맑은 고딕"/>
+              </a:rPr>
+              <a:t>KAKAO</a:t>
+            </a:r>
+          </a:p>
+        </p:txBody>
+      </p:sp>
+      <p:sp>
+        <p:nvSpPr>
+          <p:cNvPr id="16" name="텍스트"/>
+          <p:cNvSpPr txBox="1"/>
+          <p:nvPr/>
+        </p:nvSpPr>
+        <p:spPr>
+          <a:xfrm>
+            <a:off x="648000" y="1569600"/>
+            <a:ext cx="2340000" cy="121921"/>
+          </a:xfrm>
+          <a:prstGeom prst="rect">
+            <a:avLst/>
+          </a:prstGeom>
+          <a:noFill/>
+        </p:spPr>
+        <p:txBody>
+          <a:bodyPr wrap="square" lIns="0" rIns="0" tIns="0" bIns="0" anchor="t">
+            <a:spAutoFit/>
+          </a:bodyPr>
+          <a:lstStyle/>
+          <a:p>
+            <a:pPr algn="l">
+              <a:lnSpc>
+                <a:spcPts val="927"/>
+              </a:lnSpc>
+            </a:pPr>
+            <a:r>
+              <a:rPr sz="640" b="0">
+                <a:solidFill>
+                  <a:srgbClr val="12151C"/>
+                </a:solidFill>
+                <a:latin typeface="맑은 고딕"/>
+                <a:ea typeface="맑은 고딕"/>
+              </a:rPr>
+              <a:t>@채널아이디</a:t>
+            </a:r>
+          </a:p>
+        </p:txBody>
+      </p:sp>
+      <p:sp>
+        <p:nvSpPr>
+          <p:cNvPr id="17" name="텍스트"/>
+          <p:cNvSpPr txBox="1"/>
+          <p:nvPr/>
+        </p:nvSpPr>
+        <p:spPr>
+          <a:xfrm>
+            <a:off x="1548000" y="1411200"/>
+            <a:ext cx="1440000" cy="123826"/>
+          </a:xfrm>
+          <a:prstGeom prst="rect">
+            <a:avLst/>
+          </a:prstGeom>
+          <a:noFill/>
+        </p:spPr>
+        <p:txBody>
+          <a:bodyPr wrap="square" lIns="0" rIns="0" tIns="0" bIns="0" anchor="t">
+            <a:spAutoFit/>
+          </a:bodyPr>
+          <a:lstStyle/>
+          <a:p>
+            <a:pPr algn="r">
+              <a:lnSpc>
+                <a:spcPts val="942"/>
+              </a:lnSpc>
+            </a:pPr>
+            <a:r>
+              <a:rPr sz="650" b="1" spc="220">
+                <a:solidFill>
+                  <a:srgbClr val="6B7280"/>
+                </a:solidFill>
+                <a:latin typeface="맑은 고딕"/>
+                <a:ea typeface="맑은 고딕"/>
+              </a:rPr>
+              <a:t>소속 · 브랜드</a:t>
             </a:r>
           </a:p>
         </p:txBody>
